--- a/我需要有你在我生命中.pptx
+++ b/我需要有你在我生命中.pptx
@@ -167,7 +167,7 @@
           <a:lstStyle/>
           <a:p>
             <a:r>
-              <a:rPr lang="en-US" altLang="zh-TW" smtClean="0"/>
+              <a:rPr lang="en-US" altLang="zh-TW"/>
               <a:t>Click to edit Master title style</a:t>
             </a:r>
             <a:endParaRPr lang="zh-TW" altLang="en-US"/>
@@ -286,7 +286,7 @@
           </a:lstStyle>
           <a:p>
             <a:r>
-              <a:rPr lang="en-US" altLang="zh-TW" smtClean="0"/>
+              <a:rPr lang="en-US" altLang="zh-TW"/>
               <a:t>Click to edit Master subtitle style</a:t>
             </a:r>
             <a:endParaRPr lang="zh-TW" altLang="en-US"/>
@@ -310,7 +310,7 @@
           <a:p>
             <a:fld id="{641968FE-19D5-4114-B53F-D43144FE8E97}" type="datetimeFigureOut">
               <a:rPr lang="zh-TW" altLang="en-US" smtClean="0"/>
-              <a:t>2021/11/11</a:t>
+              <a:t>2026/7/11</a:t>
             </a:fld>
             <a:endParaRPr lang="zh-TW" altLang="en-US"/>
           </a:p>
@@ -404,7 +404,7 @@
           <a:lstStyle/>
           <a:p>
             <a:r>
-              <a:rPr lang="en-US" altLang="zh-TW" smtClean="0"/>
+              <a:rPr lang="en-US" altLang="zh-TW"/>
               <a:t>Click to edit Master title style</a:t>
             </a:r>
             <a:endParaRPr lang="zh-TW" altLang="en-US"/>
@@ -428,35 +428,35 @@
           <a:p>
             <a:pPr lvl="0"/>
             <a:r>
-              <a:rPr lang="en-US" altLang="zh-TW" smtClean="0"/>
+              <a:rPr lang="en-US" altLang="zh-TW"/>
               <a:t>Edit Master text styles</a:t>
             </a:r>
           </a:p>
           <a:p>
             <a:pPr lvl="1"/>
             <a:r>
-              <a:rPr lang="en-US" altLang="zh-TW" smtClean="0"/>
+              <a:rPr lang="en-US" altLang="zh-TW"/>
               <a:t>Second level</a:t>
             </a:r>
           </a:p>
           <a:p>
             <a:pPr lvl="2"/>
             <a:r>
-              <a:rPr lang="en-US" altLang="zh-TW" smtClean="0"/>
+              <a:rPr lang="en-US" altLang="zh-TW"/>
               <a:t>Third level</a:t>
             </a:r>
           </a:p>
           <a:p>
             <a:pPr lvl="3"/>
             <a:r>
-              <a:rPr lang="en-US" altLang="zh-TW" smtClean="0"/>
+              <a:rPr lang="en-US" altLang="zh-TW"/>
               <a:t>Fourth level</a:t>
             </a:r>
           </a:p>
           <a:p>
             <a:pPr lvl="4"/>
             <a:r>
-              <a:rPr lang="en-US" altLang="zh-TW" smtClean="0"/>
+              <a:rPr lang="en-US" altLang="zh-TW"/>
               <a:t>Fifth level</a:t>
             </a:r>
             <a:endParaRPr lang="zh-TW" altLang="en-US"/>
@@ -480,7 +480,7 @@
           <a:p>
             <a:fld id="{641968FE-19D5-4114-B53F-D43144FE8E97}" type="datetimeFigureOut">
               <a:rPr lang="zh-TW" altLang="en-US" smtClean="0"/>
-              <a:t>2021/11/11</a:t>
+              <a:t>2026/7/11</a:t>
             </a:fld>
             <a:endParaRPr lang="zh-TW" altLang="en-US"/>
           </a:p>
@@ -579,7 +579,7 @@
           <a:lstStyle/>
           <a:p>
             <a:r>
-              <a:rPr lang="en-US" altLang="zh-TW" smtClean="0"/>
+              <a:rPr lang="en-US" altLang="zh-TW"/>
               <a:t>Click to edit Master title style</a:t>
             </a:r>
             <a:endParaRPr lang="zh-TW" altLang="en-US"/>
@@ -608,35 +608,35 @@
           <a:p>
             <a:pPr lvl="0"/>
             <a:r>
-              <a:rPr lang="en-US" altLang="zh-TW" smtClean="0"/>
+              <a:rPr lang="en-US" altLang="zh-TW"/>
               <a:t>Edit Master text styles</a:t>
             </a:r>
           </a:p>
           <a:p>
             <a:pPr lvl="1"/>
             <a:r>
-              <a:rPr lang="en-US" altLang="zh-TW" smtClean="0"/>
+              <a:rPr lang="en-US" altLang="zh-TW"/>
               <a:t>Second level</a:t>
             </a:r>
           </a:p>
           <a:p>
             <a:pPr lvl="2"/>
             <a:r>
-              <a:rPr lang="en-US" altLang="zh-TW" smtClean="0"/>
+              <a:rPr lang="en-US" altLang="zh-TW"/>
               <a:t>Third level</a:t>
             </a:r>
           </a:p>
           <a:p>
             <a:pPr lvl="3"/>
             <a:r>
-              <a:rPr lang="en-US" altLang="zh-TW" smtClean="0"/>
+              <a:rPr lang="en-US" altLang="zh-TW"/>
               <a:t>Fourth level</a:t>
             </a:r>
           </a:p>
           <a:p>
             <a:pPr lvl="4"/>
             <a:r>
-              <a:rPr lang="en-US" altLang="zh-TW" smtClean="0"/>
+              <a:rPr lang="en-US" altLang="zh-TW"/>
               <a:t>Fifth level</a:t>
             </a:r>
             <a:endParaRPr lang="zh-TW" altLang="en-US"/>
@@ -660,7 +660,7 @@
           <a:p>
             <a:fld id="{641968FE-19D5-4114-B53F-D43144FE8E97}" type="datetimeFigureOut">
               <a:rPr lang="zh-TW" altLang="en-US" smtClean="0"/>
-              <a:t>2021/11/11</a:t>
+              <a:t>2026/7/11</a:t>
             </a:fld>
             <a:endParaRPr lang="zh-TW" altLang="en-US"/>
           </a:p>
@@ -754,7 +754,7 @@
           <a:lstStyle/>
           <a:p>
             <a:r>
-              <a:rPr lang="en-US" altLang="zh-TW" smtClean="0"/>
+              <a:rPr lang="en-US" altLang="zh-TW"/>
               <a:t>Click to edit Master title style</a:t>
             </a:r>
             <a:endParaRPr lang="zh-TW" altLang="en-US"/>
@@ -778,35 +778,35 @@
           <a:p>
             <a:pPr lvl="0"/>
             <a:r>
-              <a:rPr lang="en-US" altLang="zh-TW" smtClean="0"/>
+              <a:rPr lang="en-US" altLang="zh-TW"/>
               <a:t>Edit Master text styles</a:t>
             </a:r>
           </a:p>
           <a:p>
             <a:pPr lvl="1"/>
             <a:r>
-              <a:rPr lang="en-US" altLang="zh-TW" smtClean="0"/>
+              <a:rPr lang="en-US" altLang="zh-TW"/>
               <a:t>Second level</a:t>
             </a:r>
           </a:p>
           <a:p>
             <a:pPr lvl="2"/>
             <a:r>
-              <a:rPr lang="en-US" altLang="zh-TW" smtClean="0"/>
+              <a:rPr lang="en-US" altLang="zh-TW"/>
               <a:t>Third level</a:t>
             </a:r>
           </a:p>
           <a:p>
             <a:pPr lvl="3"/>
             <a:r>
-              <a:rPr lang="en-US" altLang="zh-TW" smtClean="0"/>
+              <a:rPr lang="en-US" altLang="zh-TW"/>
               <a:t>Fourth level</a:t>
             </a:r>
           </a:p>
           <a:p>
             <a:pPr lvl="4"/>
             <a:r>
-              <a:rPr lang="en-US" altLang="zh-TW" smtClean="0"/>
+              <a:rPr lang="en-US" altLang="zh-TW"/>
               <a:t>Fifth level</a:t>
             </a:r>
             <a:endParaRPr lang="zh-TW" altLang="en-US"/>
@@ -830,7 +830,7 @@
           <a:p>
             <a:fld id="{641968FE-19D5-4114-B53F-D43144FE8E97}" type="datetimeFigureOut">
               <a:rPr lang="zh-TW" altLang="en-US" smtClean="0"/>
-              <a:t>2021/11/11</a:t>
+              <a:t>2026/7/11</a:t>
             </a:fld>
             <a:endParaRPr lang="zh-TW" altLang="en-US"/>
           </a:p>
@@ -933,7 +933,7 @@
           </a:lstStyle>
           <a:p>
             <a:r>
-              <a:rPr lang="en-US" altLang="zh-TW" smtClean="0"/>
+              <a:rPr lang="en-US" altLang="zh-TW"/>
               <a:t>Click to edit Master title style</a:t>
             </a:r>
             <a:endParaRPr lang="zh-TW" altLang="en-US"/>
@@ -1053,7 +1053,7 @@
           <a:p>
             <a:pPr lvl="0"/>
             <a:r>
-              <a:rPr lang="en-US" altLang="zh-TW" smtClean="0"/>
+              <a:rPr lang="en-US" altLang="zh-TW"/>
               <a:t>Edit Master text styles</a:t>
             </a:r>
           </a:p>
@@ -1076,7 +1076,7 @@
           <a:p>
             <a:fld id="{641968FE-19D5-4114-B53F-D43144FE8E97}" type="datetimeFigureOut">
               <a:rPr lang="zh-TW" altLang="en-US" smtClean="0"/>
-              <a:t>2021/11/11</a:t>
+              <a:t>2026/7/11</a:t>
             </a:fld>
             <a:endParaRPr lang="zh-TW" altLang="en-US"/>
           </a:p>
@@ -1170,7 +1170,7 @@
           <a:lstStyle/>
           <a:p>
             <a:r>
-              <a:rPr lang="en-US" altLang="zh-TW" smtClean="0"/>
+              <a:rPr lang="en-US" altLang="zh-TW"/>
               <a:t>Click to edit Master title style</a:t>
             </a:r>
             <a:endParaRPr lang="zh-TW" altLang="en-US"/>
@@ -1227,35 +1227,35 @@
           <a:p>
             <a:pPr lvl="0"/>
             <a:r>
-              <a:rPr lang="en-US" altLang="zh-TW" smtClean="0"/>
+              <a:rPr lang="en-US" altLang="zh-TW"/>
               <a:t>Edit Master text styles</a:t>
             </a:r>
           </a:p>
           <a:p>
             <a:pPr lvl="1"/>
             <a:r>
-              <a:rPr lang="en-US" altLang="zh-TW" smtClean="0"/>
+              <a:rPr lang="en-US" altLang="zh-TW"/>
               <a:t>Second level</a:t>
             </a:r>
           </a:p>
           <a:p>
             <a:pPr lvl="2"/>
             <a:r>
-              <a:rPr lang="en-US" altLang="zh-TW" smtClean="0"/>
+              <a:rPr lang="en-US" altLang="zh-TW"/>
               <a:t>Third level</a:t>
             </a:r>
           </a:p>
           <a:p>
             <a:pPr lvl="3"/>
             <a:r>
-              <a:rPr lang="en-US" altLang="zh-TW" smtClean="0"/>
+              <a:rPr lang="en-US" altLang="zh-TW"/>
               <a:t>Fourth level</a:t>
             </a:r>
           </a:p>
           <a:p>
             <a:pPr lvl="4"/>
             <a:r>
-              <a:rPr lang="en-US" altLang="zh-TW" smtClean="0"/>
+              <a:rPr lang="en-US" altLang="zh-TW"/>
               <a:t>Fifth level</a:t>
             </a:r>
             <a:endParaRPr lang="zh-TW" altLang="en-US"/>
@@ -1312,35 +1312,35 @@
           <a:p>
             <a:pPr lvl="0"/>
             <a:r>
-              <a:rPr lang="en-US" altLang="zh-TW" smtClean="0"/>
+              <a:rPr lang="en-US" altLang="zh-TW"/>
               <a:t>Edit Master text styles</a:t>
             </a:r>
           </a:p>
           <a:p>
             <a:pPr lvl="1"/>
             <a:r>
-              <a:rPr lang="en-US" altLang="zh-TW" smtClean="0"/>
+              <a:rPr lang="en-US" altLang="zh-TW"/>
               <a:t>Second level</a:t>
             </a:r>
           </a:p>
           <a:p>
             <a:pPr lvl="2"/>
             <a:r>
-              <a:rPr lang="en-US" altLang="zh-TW" smtClean="0"/>
+              <a:rPr lang="en-US" altLang="zh-TW"/>
               <a:t>Third level</a:t>
             </a:r>
           </a:p>
           <a:p>
             <a:pPr lvl="3"/>
             <a:r>
-              <a:rPr lang="en-US" altLang="zh-TW" smtClean="0"/>
+              <a:rPr lang="en-US" altLang="zh-TW"/>
               <a:t>Fourth level</a:t>
             </a:r>
           </a:p>
           <a:p>
             <a:pPr lvl="4"/>
             <a:r>
-              <a:rPr lang="en-US" altLang="zh-TW" smtClean="0"/>
+              <a:rPr lang="en-US" altLang="zh-TW"/>
               <a:t>Fifth level</a:t>
             </a:r>
             <a:endParaRPr lang="zh-TW" altLang="en-US"/>
@@ -1364,7 +1364,7 @@
           <a:p>
             <a:fld id="{641968FE-19D5-4114-B53F-D43144FE8E97}" type="datetimeFigureOut">
               <a:rPr lang="zh-TW" altLang="en-US" smtClean="0"/>
-              <a:t>2021/11/11</a:t>
+              <a:t>2026/7/11</a:t>
             </a:fld>
             <a:endParaRPr lang="zh-TW" altLang="en-US"/>
           </a:p>
@@ -1462,7 +1462,7 @@
           </a:lstStyle>
           <a:p>
             <a:r>
-              <a:rPr lang="en-US" altLang="zh-TW" smtClean="0"/>
+              <a:rPr lang="en-US" altLang="zh-TW"/>
               <a:t>Click to edit Master title style</a:t>
             </a:r>
             <a:endParaRPr lang="zh-TW" altLang="en-US"/>
@@ -1528,7 +1528,7 @@
           <a:p>
             <a:pPr lvl="0"/>
             <a:r>
-              <a:rPr lang="en-US" altLang="zh-TW" smtClean="0"/>
+              <a:rPr lang="en-US" altLang="zh-TW"/>
               <a:t>Edit Master text styles</a:t>
             </a:r>
           </a:p>
@@ -1584,35 +1584,35 @@
           <a:p>
             <a:pPr lvl="0"/>
             <a:r>
-              <a:rPr lang="en-US" altLang="zh-TW" smtClean="0"/>
+              <a:rPr lang="en-US" altLang="zh-TW"/>
               <a:t>Edit Master text styles</a:t>
             </a:r>
           </a:p>
           <a:p>
             <a:pPr lvl="1"/>
             <a:r>
-              <a:rPr lang="en-US" altLang="zh-TW" smtClean="0"/>
+              <a:rPr lang="en-US" altLang="zh-TW"/>
               <a:t>Second level</a:t>
             </a:r>
           </a:p>
           <a:p>
             <a:pPr lvl="2"/>
             <a:r>
-              <a:rPr lang="en-US" altLang="zh-TW" smtClean="0"/>
+              <a:rPr lang="en-US" altLang="zh-TW"/>
               <a:t>Third level</a:t>
             </a:r>
           </a:p>
           <a:p>
             <a:pPr lvl="3"/>
             <a:r>
-              <a:rPr lang="en-US" altLang="zh-TW" smtClean="0"/>
+              <a:rPr lang="en-US" altLang="zh-TW"/>
               <a:t>Fourth level</a:t>
             </a:r>
           </a:p>
           <a:p>
             <a:pPr lvl="4"/>
             <a:r>
-              <a:rPr lang="en-US" altLang="zh-TW" smtClean="0"/>
+              <a:rPr lang="en-US" altLang="zh-TW"/>
               <a:t>Fifth level</a:t>
             </a:r>
             <a:endParaRPr lang="zh-TW" altLang="en-US"/>
@@ -1678,7 +1678,7 @@
           <a:p>
             <a:pPr lvl="0"/>
             <a:r>
-              <a:rPr lang="en-US" altLang="zh-TW" smtClean="0"/>
+              <a:rPr lang="en-US" altLang="zh-TW"/>
               <a:t>Edit Master text styles</a:t>
             </a:r>
           </a:p>
@@ -1734,35 +1734,35 @@
           <a:p>
             <a:pPr lvl="0"/>
             <a:r>
-              <a:rPr lang="en-US" altLang="zh-TW" smtClean="0"/>
+              <a:rPr lang="en-US" altLang="zh-TW"/>
               <a:t>Edit Master text styles</a:t>
             </a:r>
           </a:p>
           <a:p>
             <a:pPr lvl="1"/>
             <a:r>
-              <a:rPr lang="en-US" altLang="zh-TW" smtClean="0"/>
+              <a:rPr lang="en-US" altLang="zh-TW"/>
               <a:t>Second level</a:t>
             </a:r>
           </a:p>
           <a:p>
             <a:pPr lvl="2"/>
             <a:r>
-              <a:rPr lang="en-US" altLang="zh-TW" smtClean="0"/>
+              <a:rPr lang="en-US" altLang="zh-TW"/>
               <a:t>Third level</a:t>
             </a:r>
           </a:p>
           <a:p>
             <a:pPr lvl="3"/>
             <a:r>
-              <a:rPr lang="en-US" altLang="zh-TW" smtClean="0"/>
+              <a:rPr lang="en-US" altLang="zh-TW"/>
               <a:t>Fourth level</a:t>
             </a:r>
           </a:p>
           <a:p>
             <a:pPr lvl="4"/>
             <a:r>
-              <a:rPr lang="en-US" altLang="zh-TW" smtClean="0"/>
+              <a:rPr lang="en-US" altLang="zh-TW"/>
               <a:t>Fifth level</a:t>
             </a:r>
             <a:endParaRPr lang="zh-TW" altLang="en-US"/>
@@ -1786,7 +1786,7 @@
           <a:p>
             <a:fld id="{641968FE-19D5-4114-B53F-D43144FE8E97}" type="datetimeFigureOut">
               <a:rPr lang="zh-TW" altLang="en-US" smtClean="0"/>
-              <a:t>2021/11/11</a:t>
+              <a:t>2026/7/11</a:t>
             </a:fld>
             <a:endParaRPr lang="zh-TW" altLang="en-US"/>
           </a:p>
@@ -1880,7 +1880,7 @@
           <a:lstStyle/>
           <a:p>
             <a:r>
-              <a:rPr lang="en-US" altLang="zh-TW" smtClean="0"/>
+              <a:rPr lang="en-US" altLang="zh-TW"/>
               <a:t>Click to edit Master title style</a:t>
             </a:r>
             <a:endParaRPr lang="zh-TW" altLang="en-US"/>
@@ -1904,7 +1904,7 @@
           <a:p>
             <a:fld id="{641968FE-19D5-4114-B53F-D43144FE8E97}" type="datetimeFigureOut">
               <a:rPr lang="zh-TW" altLang="en-US" smtClean="0"/>
-              <a:t>2021/11/11</a:t>
+              <a:t>2026/7/11</a:t>
             </a:fld>
             <a:endParaRPr lang="zh-TW" altLang="en-US"/>
           </a:p>
@@ -1999,7 +1999,7 @@
           <a:p>
             <a:fld id="{641968FE-19D5-4114-B53F-D43144FE8E97}" type="datetimeFigureOut">
               <a:rPr lang="zh-TW" altLang="en-US" smtClean="0"/>
-              <a:t>2021/11/11</a:t>
+              <a:t>2026/7/11</a:t>
             </a:fld>
             <a:endParaRPr lang="zh-TW" altLang="en-US"/>
           </a:p>
@@ -2102,7 +2102,7 @@
           </a:lstStyle>
           <a:p>
             <a:r>
-              <a:rPr lang="en-US" altLang="zh-TW" smtClean="0"/>
+              <a:rPr lang="en-US" altLang="zh-TW"/>
               <a:t>Click to edit Master title style</a:t>
             </a:r>
             <a:endParaRPr lang="zh-TW" altLang="en-US"/>
@@ -2159,35 +2159,35 @@
           <a:p>
             <a:pPr lvl="0"/>
             <a:r>
-              <a:rPr lang="en-US" altLang="zh-TW" smtClean="0"/>
+              <a:rPr lang="en-US" altLang="zh-TW"/>
               <a:t>Edit Master text styles</a:t>
             </a:r>
           </a:p>
           <a:p>
             <a:pPr lvl="1"/>
             <a:r>
-              <a:rPr lang="en-US" altLang="zh-TW" smtClean="0"/>
+              <a:rPr lang="en-US" altLang="zh-TW"/>
               <a:t>Second level</a:t>
             </a:r>
           </a:p>
           <a:p>
             <a:pPr lvl="2"/>
             <a:r>
-              <a:rPr lang="en-US" altLang="zh-TW" smtClean="0"/>
+              <a:rPr lang="en-US" altLang="zh-TW"/>
               <a:t>Third level</a:t>
             </a:r>
           </a:p>
           <a:p>
             <a:pPr lvl="3"/>
             <a:r>
-              <a:rPr lang="en-US" altLang="zh-TW" smtClean="0"/>
+              <a:rPr lang="en-US" altLang="zh-TW"/>
               <a:t>Fourth level</a:t>
             </a:r>
           </a:p>
           <a:p>
             <a:pPr lvl="4"/>
             <a:r>
-              <a:rPr lang="en-US" altLang="zh-TW" smtClean="0"/>
+              <a:rPr lang="en-US" altLang="zh-TW"/>
               <a:t>Fifth level</a:t>
             </a:r>
             <a:endParaRPr lang="zh-TW" altLang="en-US"/>
@@ -2253,7 +2253,7 @@
           <a:p>
             <a:pPr lvl="0"/>
             <a:r>
-              <a:rPr lang="en-US" altLang="zh-TW" smtClean="0"/>
+              <a:rPr lang="en-US" altLang="zh-TW"/>
               <a:t>Edit Master text styles</a:t>
             </a:r>
           </a:p>
@@ -2276,7 +2276,7 @@
           <a:p>
             <a:fld id="{641968FE-19D5-4114-B53F-D43144FE8E97}" type="datetimeFigureOut">
               <a:rPr lang="zh-TW" altLang="en-US" smtClean="0"/>
-              <a:t>2021/11/11</a:t>
+              <a:t>2026/7/11</a:t>
             </a:fld>
             <a:endParaRPr lang="zh-TW" altLang="en-US"/>
           </a:p>
@@ -2379,7 +2379,7 @@
           </a:lstStyle>
           <a:p>
             <a:r>
-              <a:rPr lang="en-US" altLang="zh-TW" smtClean="0"/>
+              <a:rPr lang="en-US" altLang="zh-TW"/>
               <a:t>Click to edit Master title style</a:t>
             </a:r>
             <a:endParaRPr lang="zh-TW" altLang="en-US"/>
@@ -2444,7 +2444,7 @@
           </a:lstStyle>
           <a:p>
             <a:r>
-              <a:rPr lang="en-US" altLang="zh-TW" smtClean="0"/>
+              <a:rPr lang="en-US" altLang="zh-TW"/>
               <a:t>Click icon to add picture</a:t>
             </a:r>
             <a:endParaRPr lang="zh-TW" altLang="en-US"/>
@@ -2510,7 +2510,7 @@
           <a:p>
             <a:pPr lvl="0"/>
             <a:r>
-              <a:rPr lang="en-US" altLang="zh-TW" smtClean="0"/>
+              <a:rPr lang="en-US" altLang="zh-TW"/>
               <a:t>Edit Master text styles</a:t>
             </a:r>
           </a:p>
@@ -2533,7 +2533,7 @@
           <a:p>
             <a:fld id="{641968FE-19D5-4114-B53F-D43144FE8E97}" type="datetimeFigureOut">
               <a:rPr lang="zh-TW" altLang="en-US" smtClean="0"/>
-              <a:t>2021/11/11</a:t>
+              <a:t>2026/7/11</a:t>
             </a:fld>
             <a:endParaRPr lang="zh-TW" altLang="en-US"/>
           </a:p>
@@ -2647,10 +2647,9 @@
           <a:lstStyle/>
           <a:p>
             <a:r>
-              <a:rPr lang="zh-TW" altLang="en-US" smtClean="0"/>
+              <a:rPr lang="zh-TW" altLang="en-US"/>
               <a:t>按一下以編輯母片標題樣式</a:t>
             </a:r>
-            <a:endParaRPr lang="zh-TW" altLang="en-US"/>
           </a:p>
         </p:txBody>
       </p:sp>
@@ -2681,38 +2680,37 @@
           <a:p>
             <a:pPr lvl="0"/>
             <a:r>
-              <a:rPr lang="zh-TW" altLang="en-US" smtClean="0"/>
+              <a:rPr lang="zh-TW" altLang="en-US"/>
               <a:t>按一下以編輯母片文字樣式</a:t>
             </a:r>
           </a:p>
           <a:p>
             <a:pPr lvl="1"/>
             <a:r>
-              <a:rPr lang="zh-TW" altLang="en-US" smtClean="0"/>
+              <a:rPr lang="zh-TW" altLang="en-US"/>
               <a:t>第二層</a:t>
             </a:r>
           </a:p>
           <a:p>
             <a:pPr lvl="2"/>
             <a:r>
-              <a:rPr lang="zh-TW" altLang="en-US" smtClean="0"/>
+              <a:rPr lang="zh-TW" altLang="en-US"/>
               <a:t>第三層</a:t>
             </a:r>
           </a:p>
           <a:p>
             <a:pPr lvl="3"/>
             <a:r>
-              <a:rPr lang="zh-TW" altLang="en-US" smtClean="0"/>
+              <a:rPr lang="zh-TW" altLang="en-US"/>
               <a:t>第四層</a:t>
             </a:r>
           </a:p>
           <a:p>
             <a:pPr lvl="4"/>
             <a:r>
-              <a:rPr lang="zh-TW" altLang="en-US" smtClean="0"/>
+              <a:rPr lang="zh-TW" altLang="en-US"/>
               <a:t>第五層</a:t>
             </a:r>
-            <a:endParaRPr lang="zh-TW" altLang="en-US"/>
           </a:p>
         </p:txBody>
       </p:sp>
@@ -2751,7 +2749,7 @@
           <a:p>
             <a:fld id="{641968FE-19D5-4114-B53F-D43144FE8E97}" type="datetimeFigureOut">
               <a:rPr lang="zh-TW" altLang="en-US" smtClean="0"/>
-              <a:t>2021/11/11</a:t>
+              <a:t>2026/7/11</a:t>
             </a:fld>
             <a:endParaRPr lang="zh-TW" altLang="en-US"/>
           </a:p>
@@ -3149,7 +3147,7 @@
           <a:lstStyle/>
           <a:p>
             <a:r>
-              <a:rPr lang="zh-TW" altLang="en-US" sz="7200" b="1" i="1" dirty="0" smtClean="0">
+              <a:rPr lang="zh-TW" altLang="en-US" sz="7200" b="1" i="1" dirty="0">
                 <a:solidFill>
                   <a:srgbClr val="660033"/>
                 </a:solidFill>
@@ -3163,10 +3161,10 @@
                 <a:latin typeface="微軟正黑體" pitchFamily="34" charset="-120"/>
                 <a:ea typeface="微軟正黑體" pitchFamily="34" charset="-120"/>
               </a:rPr>
-              <a:t>我</a:t>
-            </a:r>
-            <a:r>
-              <a:rPr lang="zh-TW" altLang="en-US" sz="7200" b="1" i="1" dirty="0">
+              <a:t>我需要有</a:t>
+            </a:r>
+            <a:r>
+              <a:rPr lang="zh-CN" altLang="en-US" sz="7200" b="1" i="1" dirty="0">
                 <a:solidFill>
                   <a:srgbClr val="660033"/>
                 </a:solidFill>
@@ -3180,24 +3178,7 @@
                 <a:latin typeface="微軟正黑體" pitchFamily="34" charset="-120"/>
                 <a:ea typeface="微軟正黑體" pitchFamily="34" charset="-120"/>
               </a:rPr>
-              <a:t>需要有</a:t>
-            </a:r>
-            <a:r>
-              <a:rPr lang="zh-CN" altLang="en-US" sz="7200" b="1" i="1" dirty="0">
-                <a:solidFill>
-                  <a:srgbClr val="660033"/>
-                </a:solidFill>
-                <a:effectLst>
-                  <a:outerShdw blurRad="38100" dist="38100" dir="2700000" algn="tl">
-                    <a:srgbClr val="000000">
-                      <a:alpha val="43137"/>
-                    </a:srgbClr>
-                  </a:outerShdw>
-                </a:effectLst>
-                <a:latin typeface="微軟正黑體" pitchFamily="34" charset="-120"/>
-                <a:ea typeface="微軟正黑體" pitchFamily="34" charset="-120"/>
-              </a:rPr>
-              <a:t>袮</a:t>
+              <a:t>祢</a:t>
             </a:r>
             <a:r>
               <a:rPr lang="zh-TW" altLang="en-US" sz="7200" b="1" i="1" dirty="0">
@@ -3282,77 +3263,27 @@
                 <a:latin typeface="微軟正黑體" pitchFamily="34" charset="-120"/>
                 <a:ea typeface="微軟正黑體" pitchFamily="34" charset="-120"/>
               </a:rPr>
-              <a:t>哦主 </a:t>
-            </a:r>
-            <a:r>
-              <a:rPr lang="zh-TW" altLang="en-US" sz="6400" b="1" dirty="0" smtClean="0">
+              <a:t>哦主  求</a:t>
+            </a:r>
+            <a:r>
+              <a:rPr lang="zh-CN" altLang="en-US" sz="6400" b="1" dirty="0">
                 <a:solidFill>
                   <a:srgbClr val="660033"/>
                 </a:solidFill>
                 <a:latin typeface="微軟正黑體" pitchFamily="34" charset="-120"/>
                 <a:ea typeface="微軟正黑體" pitchFamily="34" charset="-120"/>
               </a:rPr>
-              <a:t> 求</a:t>
-            </a:r>
-            <a:r>
-              <a:rPr lang="zh-CN" altLang="en-US" sz="6400" b="1" dirty="0">
+              <a:t>祢</a:t>
+            </a:r>
+            <a:r>
+              <a:rPr lang="zh-TW" altLang="en-US" sz="6400" b="1" dirty="0">
                 <a:solidFill>
                   <a:srgbClr val="660033"/>
                 </a:solidFill>
                 <a:latin typeface="微軟正黑體" pitchFamily="34" charset="-120"/>
                 <a:ea typeface="微軟正黑體" pitchFamily="34" charset="-120"/>
               </a:rPr>
-              <a:t>袮</a:t>
-            </a:r>
-            <a:r>
-              <a:rPr lang="zh-TW" altLang="en-US" sz="6400" b="1" dirty="0">
-                <a:solidFill>
-                  <a:srgbClr val="660033"/>
-                </a:solidFill>
-                <a:latin typeface="微軟正黑體" pitchFamily="34" charset="-120"/>
-                <a:ea typeface="微軟正黑體" pitchFamily="34" charset="-120"/>
-              </a:rPr>
-              <a:t>保</a:t>
-            </a:r>
-            <a:r>
-              <a:rPr lang="zh-TW" altLang="en-US" sz="6400" b="1" dirty="0" smtClean="0">
-                <a:solidFill>
-                  <a:srgbClr val="660033"/>
-                </a:solidFill>
-                <a:latin typeface="微軟正黑體" pitchFamily="34" charset="-120"/>
-                <a:ea typeface="微軟正黑體" pitchFamily="34" charset="-120"/>
-              </a:rPr>
-              <a:t>守我</a:t>
-            </a:r>
-            <a:r>
-              <a:rPr lang="zh-TW" altLang="en-US" sz="6400" b="1" dirty="0">
-                <a:solidFill>
-                  <a:srgbClr val="660033"/>
-                </a:solidFill>
-                <a:latin typeface="微軟正黑體" pitchFamily="34" charset="-120"/>
-                <a:ea typeface="微軟正黑體" pitchFamily="34" charset="-120"/>
-              </a:rPr>
-              <a:t>的</a:t>
-            </a:r>
-            <a:r>
-              <a:rPr lang="zh-TW" altLang="en-US" sz="6400" b="1" dirty="0" smtClean="0">
-                <a:solidFill>
-                  <a:srgbClr val="660033"/>
-                </a:solidFill>
-                <a:latin typeface="微軟正黑體" pitchFamily="34" charset="-120"/>
-                <a:ea typeface="微軟正黑體" pitchFamily="34" charset="-120"/>
-              </a:rPr>
-              <a:t>心  我</a:t>
-            </a:r>
-            <a:r>
-              <a:rPr lang="zh-TW" altLang="en-US" sz="6400" b="1" dirty="0">
-                <a:solidFill>
-                  <a:srgbClr val="660033"/>
-                </a:solidFill>
-                <a:latin typeface="微軟正黑體" pitchFamily="34" charset="-120"/>
-                <a:ea typeface="微軟正黑體" pitchFamily="34" charset="-120"/>
-              </a:rPr>
-              <a:t>的意念 </a:t>
+              <a:t>保守我的心  我的意念 </a:t>
             </a:r>
             <a:endParaRPr lang="en-US" altLang="zh-TW" sz="6400" b="1" dirty="0">
               <a:solidFill>
@@ -3384,7 +3315,7 @@
                 <a:latin typeface="微軟正黑體" pitchFamily="34" charset="-120"/>
                 <a:ea typeface="微軟正黑體" pitchFamily="34" charset="-120"/>
               </a:rPr>
-              <a:t>袮</a:t>
+              <a:t>祢</a:t>
             </a:r>
             <a:r>
               <a:rPr lang="zh-TW" altLang="en-US" sz="6400" b="1" dirty="0">
@@ -3440,14 +3371,14 @@
               <a:t>( </a:t>
             </a:r>
             <a:r>
-              <a:rPr lang="zh-CN" altLang="en-US" sz="4800" b="1" dirty="0" smtClean="0">
+              <a:rPr lang="zh-CN" altLang="en-US" sz="4800" b="1" dirty="0">
                 <a:solidFill>
                   <a:srgbClr val="660033"/>
                 </a:solidFill>
                 <a:latin typeface="Microsoft JhengHei" panose="020B0604030504040204" pitchFamily="34" charset="-120"/>
                 <a:ea typeface="Microsoft JhengHei" panose="020B0604030504040204" pitchFamily="34" charset="-120"/>
               </a:rPr>
-              <a:t>正 </a:t>
+              <a:t>正歌 </a:t>
             </a:r>
             <a:r>
               <a:rPr lang="en-US" sz="4800" b="1" dirty="0">
@@ -3541,7 +3472,7 @@
                 <a:latin typeface="微軟正黑體" pitchFamily="34" charset="-120"/>
                 <a:ea typeface="微軟正黑體" pitchFamily="34" charset="-120"/>
               </a:rPr>
-              <a:t>袮</a:t>
+              <a:t>祢</a:t>
             </a:r>
             <a:r>
               <a:rPr lang="zh-TW" altLang="en-US" sz="6400" b="1" dirty="0">
@@ -3566,27 +3497,7 @@
                 <a:latin typeface="微軟正黑體" pitchFamily="34" charset="-120"/>
                 <a:ea typeface="微軟正黑體" pitchFamily="34" charset="-120"/>
               </a:rPr>
-              <a:t>作路上的光 </a:t>
-            </a:r>
-            <a:r>
-              <a:rPr lang="zh-TW" altLang="en-US" sz="6400" b="1" dirty="0">
-                <a:solidFill>
-                  <a:srgbClr val="660033"/>
-                </a:solidFill>
-                <a:latin typeface="微軟正黑體" pitchFamily="34" charset="-120"/>
-                <a:ea typeface="微軟正黑體" pitchFamily="34" charset="-120"/>
-              </a:rPr>
-              <a:t> 成</a:t>
-            </a:r>
-            <a:r>
-              <a:rPr lang="zh-TW" altLang="en-US" sz="6400" b="1" dirty="0">
-                <a:solidFill>
-                  <a:srgbClr val="660033"/>
-                </a:solidFill>
-                <a:latin typeface="微軟正黑體" pitchFamily="34" charset="-120"/>
-                <a:ea typeface="微軟正黑體" pitchFamily="34" charset="-120"/>
-              </a:rPr>
-              <a:t>為我腳前的燈</a:t>
+              <a:t>作路上的光  成為我腳前的燈</a:t>
             </a:r>
           </a:p>
         </p:txBody>
@@ -3615,7 +3526,7 @@
           <a:p>
             <a:pPr algn="ctr"/>
             <a:r>
-              <a:rPr lang="en-US" sz="4800" b="1" smtClean="0">
+              <a:rPr lang="en-US" sz="4800" b="1" dirty="0">
                 <a:solidFill>
                   <a:srgbClr val="660033"/>
                 </a:solidFill>
@@ -3625,17 +3536,17 @@
               <a:t>( </a:t>
             </a:r>
             <a:r>
-              <a:rPr lang="zh-CN" altLang="en-US" sz="4800" b="1" smtClean="0">
+              <a:rPr lang="zh-CN" altLang="en-US" sz="4800" b="1" dirty="0">
                 <a:solidFill>
                   <a:srgbClr val="660033"/>
                 </a:solidFill>
                 <a:latin typeface="Microsoft JhengHei" panose="020B0604030504040204" pitchFamily="34" charset="-120"/>
                 <a:ea typeface="Microsoft JhengHei" panose="020B0604030504040204" pitchFamily="34" charset="-120"/>
               </a:rPr>
-              <a:t>正 </a:t>
-            </a:r>
-            <a:r>
-              <a:rPr lang="en-US" sz="4800" b="1" smtClean="0">
+              <a:t>正歌 </a:t>
+            </a:r>
+            <a:r>
+              <a:rPr lang="en-US" sz="4800" b="1" dirty="0">
                 <a:solidFill>
                   <a:srgbClr val="660033"/>
                 </a:solidFill>
@@ -3716,77 +3627,27 @@
                 <a:latin typeface="微軟正黑體" pitchFamily="34" charset="-120"/>
                 <a:ea typeface="微軟正黑體" pitchFamily="34" charset="-120"/>
               </a:rPr>
-              <a:t>哦主 </a:t>
-            </a:r>
-            <a:r>
-              <a:rPr lang="zh-TW" altLang="en-US" sz="6400" b="1" dirty="0">
+              <a:t>哦主  求</a:t>
+            </a:r>
+            <a:r>
+              <a:rPr lang="zh-CN" altLang="en-US" sz="6400" b="1" dirty="0">
                 <a:solidFill>
                   <a:srgbClr val="660033"/>
                 </a:solidFill>
                 <a:latin typeface="微軟正黑體" pitchFamily="34" charset="-120"/>
                 <a:ea typeface="微軟正黑體" pitchFamily="34" charset="-120"/>
               </a:rPr>
-              <a:t> 求</a:t>
-            </a:r>
-            <a:r>
-              <a:rPr lang="zh-CN" altLang="en-US" sz="6400" b="1" dirty="0">
+              <a:t>祢</a:t>
+            </a:r>
+            <a:r>
+              <a:rPr lang="zh-TW" altLang="en-US" sz="6400" b="1" dirty="0">
                 <a:solidFill>
                   <a:srgbClr val="660033"/>
                 </a:solidFill>
                 <a:latin typeface="微軟正黑體" pitchFamily="34" charset="-120"/>
                 <a:ea typeface="微軟正黑體" pitchFamily="34" charset="-120"/>
               </a:rPr>
-              <a:t>袮</a:t>
-            </a:r>
-            <a:r>
-              <a:rPr lang="zh-TW" altLang="en-US" sz="6400" b="1" dirty="0">
-                <a:solidFill>
-                  <a:srgbClr val="660033"/>
-                </a:solidFill>
-                <a:latin typeface="微軟正黑體" pitchFamily="34" charset="-120"/>
-                <a:ea typeface="微軟正黑體" pitchFamily="34" charset="-120"/>
-              </a:rPr>
-              <a:t>堅</a:t>
-            </a:r>
-            <a:r>
-              <a:rPr lang="zh-TW" altLang="en-US" sz="6400" b="1" dirty="0" smtClean="0">
-                <a:solidFill>
-                  <a:srgbClr val="660033"/>
-                </a:solidFill>
-                <a:latin typeface="微軟正黑體" pitchFamily="34" charset="-120"/>
-                <a:ea typeface="微軟正黑體" pitchFamily="34" charset="-120"/>
-              </a:rPr>
-              <a:t>固我</a:t>
-            </a:r>
-            <a:r>
-              <a:rPr lang="zh-TW" altLang="en-US" sz="6400" b="1" dirty="0">
-                <a:solidFill>
-                  <a:srgbClr val="660033"/>
-                </a:solidFill>
-                <a:latin typeface="微軟正黑體" pitchFamily="34" charset="-120"/>
-                <a:ea typeface="微軟正黑體" pitchFamily="34" charset="-120"/>
-              </a:rPr>
-              <a:t>信</a:t>
-            </a:r>
-            <a:r>
-              <a:rPr lang="zh-TW" altLang="en-US" sz="6400" b="1" dirty="0" smtClean="0">
-                <a:solidFill>
-                  <a:srgbClr val="660033"/>
-                </a:solidFill>
-                <a:latin typeface="微軟正黑體" pitchFamily="34" charset="-120"/>
-                <a:ea typeface="微軟正黑體" pitchFamily="34" charset="-120"/>
-              </a:rPr>
-              <a:t>心  我</a:t>
-            </a:r>
-            <a:r>
-              <a:rPr lang="zh-TW" altLang="en-US" sz="6400" b="1" dirty="0">
-                <a:solidFill>
-                  <a:srgbClr val="660033"/>
-                </a:solidFill>
-                <a:latin typeface="微軟正黑體" pitchFamily="34" charset="-120"/>
-                <a:ea typeface="微軟正黑體" pitchFamily="34" charset="-120"/>
-              </a:rPr>
-              <a:t>的力量 </a:t>
+              <a:t>堅固我信心  我的力量 </a:t>
             </a:r>
             <a:endParaRPr lang="en-US" altLang="zh-TW" sz="6400" b="1" dirty="0">
               <a:solidFill>
@@ -3847,14 +3708,14 @@
               <a:t>( </a:t>
             </a:r>
             <a:r>
-              <a:rPr lang="zh-CN" altLang="en-US" sz="4800" b="1" dirty="0" smtClean="0">
+              <a:rPr lang="zh-CN" altLang="en-US" sz="4800" b="1" dirty="0">
                 <a:solidFill>
                   <a:srgbClr val="660033"/>
                 </a:solidFill>
                 <a:latin typeface="Microsoft JhengHei" panose="020B0604030504040204" pitchFamily="34" charset="-120"/>
                 <a:ea typeface="Microsoft JhengHei" panose="020B0604030504040204" pitchFamily="34" charset="-120"/>
               </a:rPr>
-              <a:t>正 </a:t>
+              <a:t>正歌 </a:t>
             </a:r>
             <a:r>
               <a:rPr lang="en-US" sz="4800" b="1" dirty="0">
@@ -3963,7 +3824,7 @@
                 <a:latin typeface="微軟正黑體" pitchFamily="34" charset="-120"/>
                 <a:ea typeface="微軟正黑體" pitchFamily="34" charset="-120"/>
               </a:rPr>
-              <a:t>袮</a:t>
+              <a:t>祢</a:t>
             </a:r>
             <a:r>
               <a:rPr lang="zh-TW" altLang="en-US" sz="6400" b="1" dirty="0">
@@ -3973,27 +3834,7 @@
                 <a:latin typeface="微軟正黑體" pitchFamily="34" charset="-120"/>
                 <a:ea typeface="微軟正黑體" pitchFamily="34" charset="-120"/>
               </a:rPr>
-              <a:t>帶領我 </a:t>
-            </a:r>
-            <a:r>
-              <a:rPr lang="zh-TW" altLang="en-US" sz="6400" b="1" dirty="0">
-                <a:solidFill>
-                  <a:srgbClr val="660033"/>
-                </a:solidFill>
-                <a:latin typeface="微軟正黑體" pitchFamily="34" charset="-120"/>
-                <a:ea typeface="微軟正黑體" pitchFamily="34" charset="-120"/>
-              </a:rPr>
-              <a:t> 使</a:t>
-            </a:r>
-            <a:r>
-              <a:rPr lang="zh-TW" altLang="en-US" sz="6400" b="1" dirty="0">
-                <a:solidFill>
-                  <a:srgbClr val="660033"/>
-                </a:solidFill>
-                <a:latin typeface="微軟正黑體" pitchFamily="34" charset="-120"/>
-                <a:ea typeface="微軟正黑體" pitchFamily="34" charset="-120"/>
-              </a:rPr>
-              <a:t>我不會再退縮</a:t>
+              <a:t>帶領我  使我不會再退縮</a:t>
             </a:r>
           </a:p>
         </p:txBody>
@@ -4022,7 +3863,7 @@
           <a:p>
             <a:pPr algn="ctr"/>
             <a:r>
-              <a:rPr lang="en-US" sz="4800" b="1" dirty="0" smtClean="0">
+              <a:rPr lang="en-US" sz="4800" b="1" dirty="0">
                 <a:solidFill>
                   <a:srgbClr val="660033"/>
                 </a:solidFill>
@@ -4032,17 +3873,17 @@
               <a:t>( </a:t>
             </a:r>
             <a:r>
-              <a:rPr lang="zh-CN" altLang="en-US" sz="4800" b="1" dirty="0" smtClean="0">
+              <a:rPr lang="zh-CN" altLang="en-US" sz="4800" b="1" dirty="0">
                 <a:solidFill>
                   <a:srgbClr val="660033"/>
                 </a:solidFill>
                 <a:latin typeface="Microsoft JhengHei" panose="020B0604030504040204" pitchFamily="34" charset="-120"/>
                 <a:ea typeface="Microsoft JhengHei" panose="020B0604030504040204" pitchFamily="34" charset="-120"/>
               </a:rPr>
-              <a:t>正 </a:t>
-            </a:r>
-            <a:r>
-              <a:rPr lang="en-US" sz="4800" b="1" dirty="0" smtClean="0">
+              <a:t>正歌 </a:t>
+            </a:r>
+            <a:r>
+              <a:rPr lang="en-US" sz="4800" b="1" dirty="0">
                 <a:solidFill>
                   <a:srgbClr val="660033"/>
                 </a:solidFill>
@@ -4133,7 +3974,7 @@
                 <a:latin typeface="微軟正黑體" pitchFamily="34" charset="-120"/>
                 <a:ea typeface="微軟正黑體" pitchFamily="34" charset="-120"/>
               </a:rPr>
-              <a:t>袮</a:t>
+              <a:t>祢</a:t>
             </a:r>
             <a:r>
               <a:rPr lang="zh-TW" altLang="en-US" sz="6400" b="1" dirty="0">
@@ -4175,7 +4016,7 @@
                 <a:latin typeface="微軟正黑體" pitchFamily="34" charset="-120"/>
                 <a:ea typeface="微軟正黑體" pitchFamily="34" charset="-120"/>
               </a:rPr>
-              <a:t>袮</a:t>
+              <a:t>祢</a:t>
             </a:r>
             <a:r>
               <a:rPr lang="zh-TW" altLang="en-US" sz="6400" b="1" dirty="0">
@@ -4214,7 +4055,7 @@
           <a:p>
             <a:pPr algn="ctr"/>
             <a:r>
-              <a:rPr lang="en-US" sz="4800" b="1" dirty="0" smtClean="0">
+              <a:rPr lang="en-US" sz="4800" b="1" dirty="0">
                 <a:solidFill>
                   <a:srgbClr val="660033"/>
                 </a:solidFill>
@@ -4224,17 +4065,17 @@
               <a:t>( </a:t>
             </a:r>
             <a:r>
-              <a:rPr lang="zh-CN" altLang="en-US" sz="4800" b="1" dirty="0" smtClean="0">
+              <a:rPr lang="zh-CN" altLang="en-US" sz="4800" b="1" dirty="0">
                 <a:solidFill>
                   <a:srgbClr val="660033"/>
                 </a:solidFill>
                 <a:latin typeface="Microsoft JhengHei" panose="020B0604030504040204" pitchFamily="34" charset="-120"/>
                 <a:ea typeface="Microsoft JhengHei" panose="020B0604030504040204" pitchFamily="34" charset="-120"/>
               </a:rPr>
-              <a:t>副 </a:t>
-            </a:r>
-            <a:r>
-              <a:rPr lang="en-US" sz="4800" b="1" dirty="0" smtClean="0">
+              <a:t>副歌 </a:t>
+            </a:r>
+            <a:r>
+              <a:rPr lang="en-US" sz="4800" b="1" dirty="0">
                 <a:solidFill>
                   <a:srgbClr val="660033"/>
                 </a:solidFill>
@@ -4325,7 +4166,7 @@
                 <a:latin typeface="微軟正黑體" pitchFamily="34" charset="-120"/>
                 <a:ea typeface="微軟正黑體" pitchFamily="34" charset="-120"/>
               </a:rPr>
-              <a:t>袮</a:t>
+              <a:t>祢</a:t>
             </a:r>
             <a:r>
               <a:rPr lang="zh-TW" altLang="en-US" sz="6400" b="1" dirty="0">
@@ -4350,37 +4191,17 @@
                 <a:latin typeface="微軟正黑體" pitchFamily="34" charset="-120"/>
                 <a:ea typeface="微軟正黑體" pitchFamily="34" charset="-120"/>
               </a:rPr>
-              <a:t>使我的生命 </a:t>
-            </a:r>
-            <a:r>
-              <a:rPr lang="zh-TW" altLang="en-US" sz="6400" b="1" dirty="0">
+              <a:t>使我的生命  能夠彰顯</a:t>
+            </a:r>
+            <a:r>
+              <a:rPr lang="zh-CN" altLang="en-US" sz="6400" b="1" dirty="0">
                 <a:solidFill>
                   <a:srgbClr val="660033"/>
                 </a:solidFill>
                 <a:latin typeface="微軟正黑體" pitchFamily="34" charset="-120"/>
                 <a:ea typeface="微軟正黑體" pitchFamily="34" charset="-120"/>
               </a:rPr>
-              <a:t> 能</a:t>
-            </a:r>
-            <a:r>
-              <a:rPr lang="zh-TW" altLang="en-US" sz="6400" b="1" dirty="0">
-                <a:solidFill>
-                  <a:srgbClr val="660033"/>
-                </a:solidFill>
-                <a:latin typeface="微軟正黑體" pitchFamily="34" charset="-120"/>
-                <a:ea typeface="微軟正黑體" pitchFamily="34" charset="-120"/>
-              </a:rPr>
-              <a:t>夠彰顯</a:t>
-            </a:r>
-            <a:r>
-              <a:rPr lang="zh-CN" altLang="en-US" sz="6400" b="1" dirty="0">
-                <a:solidFill>
-                  <a:srgbClr val="660033"/>
-                </a:solidFill>
-                <a:latin typeface="微軟正黑體" pitchFamily="34" charset="-120"/>
-                <a:ea typeface="微軟正黑體" pitchFamily="34" charset="-120"/>
-              </a:rPr>
-              <a:t>袮</a:t>
+              <a:t>祢</a:t>
             </a:r>
             <a:r>
               <a:rPr lang="zh-TW" altLang="en-US" sz="6400" b="1" dirty="0">
@@ -4419,7 +4240,7 @@
           <a:p>
             <a:pPr algn="ctr"/>
             <a:r>
-              <a:rPr lang="en-US" sz="4800" b="1" dirty="0" smtClean="0">
+              <a:rPr lang="en-US" sz="4800" b="1" dirty="0">
                 <a:solidFill>
                   <a:srgbClr val="660033"/>
                 </a:solidFill>
@@ -4429,17 +4250,17 @@
               <a:t>( </a:t>
             </a:r>
             <a:r>
-              <a:rPr lang="zh-CN" altLang="en-US" sz="4800" b="1" dirty="0" smtClean="0">
+              <a:rPr lang="zh-CN" altLang="en-US" sz="4800" b="1" dirty="0">
                 <a:solidFill>
                   <a:srgbClr val="660033"/>
                 </a:solidFill>
                 <a:latin typeface="Microsoft JhengHei" panose="020B0604030504040204" pitchFamily="34" charset="-120"/>
                 <a:ea typeface="Microsoft JhengHei" panose="020B0604030504040204" pitchFamily="34" charset="-120"/>
               </a:rPr>
-              <a:t>副 </a:t>
-            </a:r>
-            <a:r>
-              <a:rPr lang="en-US" sz="4800" b="1" dirty="0" smtClean="0">
+              <a:t>副歌 </a:t>
+            </a:r>
+            <a:r>
+              <a:rPr lang="en-US" sz="4800" b="1" dirty="0">
                 <a:solidFill>
                   <a:srgbClr val="660033"/>
                 </a:solidFill>
